--- a/slides/Turkey_Biomarkers_CH.pptx
+++ b/slides/Turkey_Biomarkers_CH.pptx
@@ -5277,13 +5277,13 @@
             <a:tbl>
               <a:tblPr/>
               <a:tblGrid>
-                <a:gridCol w="2743200"/>
-                <a:gridCol w="2377440"/>
-                <a:gridCol w="1280160"/>
-                <a:gridCol w="1828800"/>
+                <a:gridCol w="2651760"/>
+                <a:gridCol w="2194560"/>
+                <a:gridCol w="1188720"/>
+                <a:gridCol w="1737360"/>
                 <a:gridCol w="1005840"/>
+                <a:gridCol w="1097280"/>
                 <a:gridCol w="1188720"/>
-                <a:gridCol w="1463040"/>
               </a:tblGrid>
               <a:tr h="457200">
                 <a:tc>
@@ -7741,7 +7741,7 @@
                 <a:ea typeface="微软雅黑" pitchFamily="34" charset="-122"/>
                 <a:cs typeface="微软雅黑" pitchFamily="34" charset="-120"/>
               </a:rPr>
-              <a:t>19 个 FDR 显著的菌，经 L1 只剩 4 个。鸭队列也是如此——L1 正是把 19 收敛到 9 的那一步。</a:t>
+              <a:t>19 个菌达到 FDR&lt;0.05，经 L1 只剩 4 个。鸭队列也是如此——L1 正是把 19 收敛到 9 的那一步。</a:t>
             </a:r>
             <a:endParaRPr lang="en-US" sz="1100" dirty="0"/>
           </a:p>

--- a/slides/Turkey_Biomarkers_CH.pptx
+++ b/slides/Turkey_Biomarkers_CH.pptx
@@ -2285,7 +2285,7 @@
                           <a:ea typeface="微软雅黑" pitchFamily="34" charset="-122"/>
                           <a:cs typeface="微软雅黑" pitchFamily="34" charset="-120"/>
                         </a:rPr>
-                        <a:t>7 个候选（§2.3）</a:t>
+                        <a:t>7 个候选（§2.3，第 ③ 关不同）</a:t>
                       </a:r>
                       <a:endParaRPr lang="en-US" sz="1150" dirty="0">
                         <a:latin typeface="微软雅黑" charset="0"/>
@@ -7827,7 +7827,7 @@
                 <a:ea typeface="微软雅黑" pitchFamily="34" charset="-122"/>
                 <a:cs typeface="微软雅黑" pitchFamily="34" charset="-120"/>
               </a:rPr>
-              <a:t>与 §2.3 那 7 个的关系</a:t>
+              <a:t>与 §2.3 那 7 个不是包含关系</a:t>
             </a:r>
             <a:endParaRPr lang="en-US" sz="1400" dirty="0"/>
           </a:p>
@@ -7861,7 +7861,7 @@
               <a:buNone/>
             </a:pPr>
             <a:r>
-              <a:rPr lang="en-US" sz="1100" dirty="0">
+              <a:rPr lang="en-US" sz="1050" dirty="0">
                 <a:solidFill>
                   <a:srgbClr val="5F7580"/>
                 </a:solidFill>
@@ -7869,9 +7869,69 @@
                 <a:ea typeface="微软雅黑" pitchFamily="34" charset="-122"/>
                 <a:cs typeface="微软雅黑" pitchFamily="34" charset="-120"/>
               </a:rPr>
-              <a:t>这 4 个是那 7 个的更严子集。加上 L1 后，Pediococcus、未定属 Lactobacillaceae、Incertae_Sedis、Weissella 未能在三个 C 下都稳定入选。</a:t>
+              <a:t>两者都从 §2.2 的 11 个出发，只是第三道关不同：</a:t>
             </a:r>
-            <a:endParaRPr lang="en-US" sz="1100" dirty="0"/>
+            <a:endParaRPr lang="en-US" sz="1050" dirty="0"/>
+          </a:p>
+          <a:p>
+            <a:pPr indent="0" marL="0">
+              <a:lnSpc>
+                <a:spcPct val="112000"/>
+              </a:lnSpc>
+              <a:buNone/>
+            </a:pPr>
+            <a:r>
+              <a:rPr lang="en-US" sz="1050" dirty="0">
+                <a:solidFill>
+                  <a:srgbClr val="5F7580"/>
+                </a:solidFill>
+                <a:latin typeface="微软雅黑" pitchFamily="34" charset="0"/>
+                <a:ea typeface="微软雅黑" pitchFamily="34" charset="-122"/>
+                <a:cs typeface="微软雅黑" pitchFamily="34" charset="-120"/>
+              </a:rPr>
+              <a:t>    11 ─┬─ 过笼效应筛查 → 7 个（§2.3）</a:t>
+            </a:r>
+            <a:endParaRPr lang="en-US" sz="1050" dirty="0"/>
+          </a:p>
+          <a:p>
+            <a:pPr indent="0" marL="0">
+              <a:lnSpc>
+                <a:spcPct val="112000"/>
+              </a:lnSpc>
+              <a:buNone/>
+            </a:pPr>
+            <a:r>
+              <a:rPr lang="en-US" sz="1050" dirty="0">
+                <a:solidFill>
+                  <a:srgbClr val="5F7580"/>
+                </a:solidFill>
+                <a:latin typeface="微软雅黑" pitchFamily="34" charset="0"/>
+                <a:ea typeface="微软雅黑" pitchFamily="34" charset="-122"/>
+                <a:cs typeface="微软雅黑" pitchFamily="34" charset="-120"/>
+              </a:rPr>
+              <a:t>         └─ 过 L1 稳定性 → 4 个（本页）</a:t>
+            </a:r>
+            <a:endParaRPr lang="en-US" sz="1050" dirty="0"/>
+          </a:p>
+          <a:p>
+            <a:pPr indent="0" marL="0">
+              <a:lnSpc>
+                <a:spcPct val="112000"/>
+              </a:lnSpc>
+              <a:buNone/>
+            </a:pPr>
+            <a:r>
+              <a:rPr lang="en-US" sz="1050" dirty="0">
+                <a:solidFill>
+                  <a:srgbClr val="5F7580"/>
+                </a:solidFill>
+                <a:latin typeface="微软雅黑" pitchFamily="34" charset="0"/>
+                <a:ea typeface="微软雅黑" pitchFamily="34" charset="-122"/>
+                <a:cs typeface="微软雅黑" pitchFamily="34" charset="-120"/>
+              </a:rPr>
+              <a:t>            两者交集 → 2 个</a:t>
+            </a:r>
+            <a:endParaRPr lang="en-US" sz="1050" dirty="0"/>
           </a:p>
         </p:txBody>
       </p:sp>
@@ -7908,7 +7968,7 @@
                 <a:ea typeface="微软雅黑" pitchFamily="34" charset="-122"/>
                 <a:cs typeface="微软雅黑" pitchFamily="34" charset="-120"/>
               </a:rPr>
-              <a:t>与鸭队列比较时用这 4 个；列本队列全部候选时用 §2.3 的 7 个 —— 两者都对，只是严格程度不同。</a:t>
+              <a:t>同时通过两道关的只有 2 个：HT002 与 Escherichia-Shigella —— 那是本队列最可靠的候选。与鸭队列作方法学比较时用这 4 个（口径相同）。</a:t>
             </a:r>
             <a:endParaRPr lang="en-US" sz="1300" dirty="0"/>
           </a:p>

--- a/slides/Turkey_Biomarkers_CH.pptx
+++ b/slides/Turkey_Biomarkers_CH.pptx
@@ -2285,7 +2285,7 @@
                           <a:ea typeface="微软雅黑" pitchFamily="34" charset="-122"/>
                           <a:cs typeface="微软雅黑" pitchFamily="34" charset="-120"/>
                         </a:rPr>
-                        <a:t>7 个候选（§2.3，第 ③ 关不同）</a:t>
+                        <a:t>7 个候选（口径不完整，已废弃）</a:t>
                       </a:r>
                       <a:endParaRPr lang="en-US" sz="1150" dirty="0">
                         <a:latin typeface="微软雅黑" charset="0"/>
@@ -7827,7 +7827,7 @@
                 <a:ea typeface="微软雅黑" pitchFamily="34" charset="-122"/>
                 <a:cs typeface="微软雅黑" pitchFamily="34" charset="-120"/>
               </a:rPr>
-              <a:t>与 §2.3 那 7 个不是包含关系</a:t>
+              <a:t>第四层为什么不能省</a:t>
             </a:r>
             <a:endParaRPr lang="en-US" sz="1400" dirty="0"/>
           </a:p>
@@ -7861,7 +7861,7 @@
               <a:buNone/>
             </a:pPr>
             <a:r>
-              <a:rPr lang="en-US" sz="1050" dirty="0">
+              <a:rPr lang="en-US" sz="1100" dirty="0">
                 <a:solidFill>
                   <a:srgbClr val="5F7580"/>
                 </a:solidFill>
@@ -7869,69 +7869,9 @@
                 <a:ea typeface="微软雅黑" pitchFamily="34" charset="-122"/>
                 <a:cs typeface="微软雅黑" pitchFamily="34" charset="-120"/>
               </a:rPr>
-              <a:t>两者都从 §2.2 的 11 个出发，只是第三道关不同：</a:t>
+              <a:t>Negativibacillus 三套方法全场最强，却在同为阳性的四个隔离器之间也显著不同。省掉笼效应筛查，报告出去的就是这 4 个而非 2 个，其中一半无法归因于感染。</a:t>
             </a:r>
-            <a:endParaRPr lang="en-US" sz="1050" dirty="0"/>
-          </a:p>
-          <a:p>
-            <a:pPr indent="0" marL="0">
-              <a:lnSpc>
-                <a:spcPct val="112000"/>
-              </a:lnSpc>
-              <a:buNone/>
-            </a:pPr>
-            <a:r>
-              <a:rPr lang="en-US" sz="1050" dirty="0">
-                <a:solidFill>
-                  <a:srgbClr val="5F7580"/>
-                </a:solidFill>
-                <a:latin typeface="微软雅黑" pitchFamily="34" charset="0"/>
-                <a:ea typeface="微软雅黑" pitchFamily="34" charset="-122"/>
-                <a:cs typeface="微软雅黑" pitchFamily="34" charset="-120"/>
-              </a:rPr>
-              <a:t>    11 ─┬─ 过笼效应筛查 → 7 个（§2.3）</a:t>
-            </a:r>
-            <a:endParaRPr lang="en-US" sz="1050" dirty="0"/>
-          </a:p>
-          <a:p>
-            <a:pPr indent="0" marL="0">
-              <a:lnSpc>
-                <a:spcPct val="112000"/>
-              </a:lnSpc>
-              <a:buNone/>
-            </a:pPr>
-            <a:r>
-              <a:rPr lang="en-US" sz="1050" dirty="0">
-                <a:solidFill>
-                  <a:srgbClr val="5F7580"/>
-                </a:solidFill>
-                <a:latin typeface="微软雅黑" pitchFamily="34" charset="0"/>
-                <a:ea typeface="微软雅黑" pitchFamily="34" charset="-122"/>
-                <a:cs typeface="微软雅黑" pitchFamily="34" charset="-120"/>
-              </a:rPr>
-              <a:t>         └─ 过 L1 稳定性 → 4 个（本页）</a:t>
-            </a:r>
-            <a:endParaRPr lang="en-US" sz="1050" dirty="0"/>
-          </a:p>
-          <a:p>
-            <a:pPr indent="0" marL="0">
-              <a:lnSpc>
-                <a:spcPct val="112000"/>
-              </a:lnSpc>
-              <a:buNone/>
-            </a:pPr>
-            <a:r>
-              <a:rPr lang="en-US" sz="1050" dirty="0">
-                <a:solidFill>
-                  <a:srgbClr val="5F7580"/>
-                </a:solidFill>
-                <a:latin typeface="微软雅黑" pitchFamily="34" charset="0"/>
-                <a:ea typeface="微软雅黑" pitchFamily="34" charset="-122"/>
-                <a:cs typeface="微软雅黑" pitchFamily="34" charset="-120"/>
-              </a:rPr>
-              <a:t>            两者交集 → 2 个</a:t>
-            </a:r>
-            <a:endParaRPr lang="en-US" sz="1050" dirty="0"/>
+            <a:endParaRPr lang="en-US" sz="1100" dirty="0"/>
           </a:p>
         </p:txBody>
       </p:sp>
@@ -7968,7 +7908,7 @@
                 <a:ea typeface="微软雅黑" pitchFamily="34" charset="-122"/>
                 <a:cs typeface="微软雅黑" pitchFamily="34" charset="-120"/>
               </a:rPr>
-              <a:t>同时通过两道关的只有 2 个：HT002 与 Escherichia-Shigella —— 那是本队列最可靠的候选。与鸭队列作方法学比较时用这 4 个（口径相同）。</a:t>
+              <a:t>四层全部通过的只有 2 个：HT002（Pos↓）与 Escherichia-Shigella（Pos↑）—— 这是本队列可报告的候选。前三层与鸭队列同口径，因此两队列可比。</a:t>
             </a:r>
             <a:endParaRPr lang="en-US" sz="1300" dirty="0"/>
           </a:p>
